--- a/presentation/ML_Demand_Prediction_Final_Defense.pptx
+++ b/presentation/ML_Demand_Prediction_Final_Defense.pptx
@@ -3680,7 +3680,7 @@
               </a:defRPr>
             </a:pPr>
             <a:r>
-              <a:t>Linear Regression achieved the best synthetic holdout RMSE (81.2 units).</a:t>
+              <a:t>Linear Regression achieved the best synthetic holdout RMSE (505.4 units).</a:t>
             </a:r>
           </a:p>
           <a:p>
@@ -4509,7 +4509,7 @@
               </a:defRPr>
             </a:pPr>
             <a:r>
-              <a:t>Selected model: Linear Regression · MAE 62.5 · RMSE 81.2 · R² 0.913</a:t>
+              <a:t>Selected model: Linear Regression · MAE 379.3 · RMSE 505.4 · R² 0.977</a:t>
             </a:r>
           </a:p>
         </p:txBody>
@@ -5155,7 +5155,7 @@
               </a:defRPr>
             </a:pPr>
             <a:r>
-              <a:t>Shampoo: predict 1,653; recommend 1,465 units</a:t>
+              <a:t>Shampoo: predict 3,409; recommend 3,397 units</a:t>
             </a:r>
           </a:p>
           <a:p>
@@ -5170,7 +5170,7 @@
               </a:defRPr>
             </a:pPr>
             <a:r>
-              <a:t>Body Wash: predict 1,167; recommend 1,183 units</a:t>
+              <a:t>Body Wash: predict 2,357; recommend 2,492 units</a:t>
             </a:r>
           </a:p>
           <a:p>
@@ -5185,7 +5185,7 @@
               </a:defRPr>
             </a:pPr>
             <a:r>
-              <a:t>Laundry Detergent: predict 1,741; recommend 1,524 units</a:t>
+              <a:t>Laundry Detergent: predict 2,789; recommend 2,677 units</a:t>
             </a:r>
           </a:p>
         </p:txBody>
